--- a/public/fun/pack/pptx/newspro/카드뉴스프리미엄_32_건강·안심습관_토프아이보리.pptx
+++ b/public/fun/pack/pptx/newspro/카드뉴스프리미엄_32_건강·안심습관_토프아이보리.pptx
@@ -113,12 +113,12 @@
   <p:extLst>
     <p:ext uri="{521415D9-36F7-43E2-AB2F-B90AF26B5E84}">
       <p14:sectionLst xmlns:p14="http://schemas.microsoft.com/office/powerpoint/2010/main">
-        <p14:section name="시작" id="{B68AD691-BD5A-454C-B435-142B3C87F8AD}">
+        <p14:section name="시작" id="{05FB6D85-25BE-488B-98A1-A43957EA13D8}">
           <p14:sldIdLst>
             <p14:sldId id="256"/>
           </p14:sldIdLst>
         </p14:section>
-        <p14:section name="본문" id="{5AE0F438-1DCC-4D45-97B3-3117A4440469}">
+        <p14:section name="본문" id="{9CA32E78-2E5E-4C58-BDF0-404F627340C4}">
           <p14:sldIdLst>
             <p14:sldId id="257"/>
             <p14:sldId id="258"/>
@@ -127,7 +127,7 @@
             <p14:sldId id="261"/>
           </p14:sldIdLst>
         </p14:section>
-        <p14:section name="마무리" id="{E0B88414-E8D0-48D6-8DA1-EC3EEE4DDC50}">
+        <p14:section name="마무리" id="{257ACB54-ADF0-4A87-82DC-513F6491B6DC}">
           <p14:sldIdLst>
             <p14:sldId id="262"/>
           </p14:sldIdLst>
@@ -1527,7 +1527,7 @@
             </a:lvl1pPr>
           </a:lstStyle>
           <a:p>
-            <a:fld id="{E49EF2C9-CD20-43EF-BCEF-9AFC0155A722}" type="slidenum">
+            <a:fld id="{B2A8F141-5408-4D5B-9A90-F25CAF87189B}" type="slidenum">
               <a:rPr lang="en-US"/>
               <a:t>‹#›</a:t>
             </a:fld>
@@ -2187,7 +2187,7 @@
             </a:lvl1pPr>
           </a:lstStyle>
           <a:p>
-            <a:fld id="{AAF9164C-9A39-48A5-8CFB-0FCC332A32E8}" type="slidenum">
+            <a:fld id="{F9C2319B-4774-499F-9FC4-7E3710CD55BF}" type="slidenum">
               <a:rPr lang="en-US"/>
               <a:t>‹#›</a:t>
             </a:fld>
@@ -2865,7 +2865,7 @@
             </a:lvl1pPr>
           </a:lstStyle>
           <a:p>
-            <a:fld id="{9FAE4113-17D7-4B86-8D83-AE40FF812E4F}" type="slidenum">
+            <a:fld id="{EA1F476C-D01D-40D4-859E-43563A0C5125}" type="slidenum">
               <a:rPr lang="en-US"/>
               <a:t>‹#›</a:t>
             </a:fld>
@@ -3813,7 +3813,7 @@
           <a:bodyPr/>
           <a:lstStyle/>
           <a:p>
-            <a:fld id="{272B017F-2644-4F43-95B0-CDDF6E97B0C8}" type="slidenum">
+            <a:fld id="{78C36E84-7E2C-4350-8DFA-ECD20B830ACB}" type="slidenum">
               <a:rPr lang="en-US"/>
               <a:t>‹#›</a:t>
             </a:fld>
@@ -3979,7 +3979,7 @@
           <a:bodyPr/>
           <a:lstStyle/>
           <a:p>
-            <a:fld id="{4C1CB00A-B45D-4FAD-BC52-D9CB877ECBB4}" type="slidenum">
+            <a:fld id="{102E5AC1-E61B-4CB6-B6FB-19216499B03A}" type="slidenum">
               <a:rPr lang="en-US"/>
               <a:t>‹#›</a:t>
             </a:fld>
@@ -4145,7 +4145,7 @@
           <a:bodyPr/>
           <a:lstStyle/>
           <a:p>
-            <a:fld id="{9FCFE4FA-EEE3-498E-BDE0-BA5E28D0D512}" type="slidenum">
+            <a:fld id="{24835E5C-06ED-423F-B728-D1D898A1E943}" type="slidenum">
               <a:rPr lang="en-US"/>
               <a:t>‹#›</a:t>
             </a:fld>
@@ -4311,7 +4311,7 @@
           <a:bodyPr/>
           <a:lstStyle/>
           <a:p>
-            <a:fld id="{23059AB9-C0BB-432C-909C-1D710060C97C}" type="slidenum">
+            <a:fld id="{7A33FE44-0464-4FA2-98E7-69485BFDFB38}" type="slidenum">
               <a:rPr lang="en-US"/>
               <a:t>‹#›</a:t>
             </a:fld>
@@ -4477,7 +4477,7 @@
           <a:bodyPr/>
           <a:lstStyle/>
           <a:p>
-            <a:fld id="{F6012A9A-8A2E-4AEC-A0CE-5E805EAD99E5}" type="slidenum">
+            <a:fld id="{43BC8EE3-FF8D-48DA-871A-690041F655C6}" type="slidenum">
               <a:rPr lang="en-US"/>
               <a:t>‹#›</a:t>
             </a:fld>
